--- a/public/fun/cards/office/office-21.pptx
+++ b/public/fun/cards/office/office-21.pptx
@@ -3085,7 +3085,7 @@
     <p:bg>
       <p:bgPr>
         <a:solidFill>
-          <a:srgbClr val="1C3629"/>
+          <a:srgbClr val="0E1116"/>
         </a:solidFill>
         <a:effectLst/>
       </p:bgPr>
@@ -3099,20 +3099,22 @@
       <p:grpSpPr/>
       <p:sp>
         <p:nvSpPr>
-          <p:cNvPr id="2" name="Rectangle 1"/>
+          <p:cNvPr id="2" name="Rounded Rectangle 1"/>
           <p:cNvSpPr/>
           <p:nvPr/>
         </p:nvSpPr>
         <p:spPr>
           <a:xfrm>
-            <a:off x="0" y="0"/>
-            <a:ext cx="165600" cy="1800000"/>
+            <a:off x="252000" y="230400"/>
+            <a:ext cx="899704" cy="180000"/>
           </a:xfrm>
-          <a:prstGeom prst="rect">
-            <a:avLst/>
+          <a:prstGeom prst="roundRect">
+            <a:avLst>
+              <a:gd name="adj" fmla="val 50000"/>
+            </a:avLst>
           </a:prstGeom>
           <a:solidFill>
-            <a:srgbClr val="709784"/>
+            <a:srgbClr val="FF3B6B"/>
           </a:solidFill>
           <a:ln>
             <a:noFill/>
@@ -3128,75 +3130,124 @@
       </p:sp>
       <p:sp>
         <p:nvSpPr>
-          <p:cNvPr id="3" name="Rectangle 2"/>
-          <p:cNvSpPr/>
+          <p:cNvPr id="3" name="텍스트"/>
+          <p:cNvSpPr txBox="1"/>
           <p:nvPr/>
         </p:nvSpPr>
         <p:spPr>
           <a:xfrm>
-            <a:off x="165600" y="0"/>
-            <a:ext cx="36000" cy="1800000"/>
+            <a:off x="252000" y="230400"/>
+            <a:ext cx="899704" cy="180000"/>
           </a:xfrm>
           <a:prstGeom prst="rect">
             <a:avLst/>
           </a:prstGeom>
-          <a:solidFill>
-            <a:srgbClr val="40564B"/>
-          </a:solidFill>
-          <a:ln>
-            <a:noFill/>
-          </a:ln>
+          <a:noFill/>
         </p:spPr>
         <p:txBody>
-          <a:bodyPr rtlCol="0" anchor="ctr"/>
-          <a:lstStyle/>
-          <a:p>
-            <a:pPr algn="ctr"/>
-          </a:p>
-        </p:txBody>
-      </p:sp>
-      <p:cxnSp>
-        <p:nvCxnSpPr>
-          <p:cNvPr id="4" name="Connector 3"/>
-          <p:cNvCxnSpPr/>
+          <a:bodyPr wrap="square" lIns="0" rIns="0" tIns="0" bIns="0" anchor="ctr">
+            <a:spAutoFit/>
+          </a:bodyPr>
+          <a:lstStyle/>
+          <a:p>
+            <a:pPr algn="ctr">
+              <a:lnSpc>
+                <a:spcPts val="1160"/>
+              </a:lnSpc>
+            </a:pPr>
+            <a:r>
+              <a:rPr sz="800" b="1">
+                <a:solidFill>
+                  <a:srgbClr val="FFFFFF"/>
+                </a:solidFill>
+                <a:latin typeface="맑은 고딕"/>
+                <a:ea typeface="맑은 고딕"/>
+              </a:rPr>
+              <a:t>영업팀 대리</a:t>
+            </a:r>
+          </a:p>
+        </p:txBody>
+      </p:sp>
+      <p:sp>
+        <p:nvSpPr>
+          <p:cNvPr id="4" name="텍스트"/>
+          <p:cNvSpPr txBox="1"/>
           <p:nvPr/>
-        </p:nvCxnSpPr>
+        </p:nvSpPr>
         <p:spPr>
-          <a:xfrm flipH="1">
-            <a:off x="2669760" y="288144"/>
-            <a:ext cx="89856" cy="89856"/>
+          <a:xfrm>
+            <a:off x="252000" y="568800"/>
+            <a:ext cx="2520000" cy="396000"/>
           </a:xfrm>
-          <a:prstGeom prst="line">
+          <a:prstGeom prst="rect">
             <a:avLst/>
           </a:prstGeom>
-          <a:ln w="27648">
-            <a:solidFill>
-              <a:srgbClr val="709784"/>
-            </a:solidFill>
-          </a:ln>
+          <a:noFill/>
         </p:spPr>
-      </p:cxnSp>
-      <p:cxnSp>
-        <p:nvCxnSpPr>
-          <p:cNvPr id="5" name="Connector 4"/>
-          <p:cNvCxnSpPr/>
+        <p:txBody>
+          <a:bodyPr wrap="square" lIns="0" rIns="0" tIns="0" bIns="0" anchor="t">
+            <a:spAutoFit/>
+          </a:bodyPr>
+          <a:lstStyle/>
+          <a:p>
+            <a:pPr algn="l">
+              <a:lnSpc>
+                <a:spcPts val="3479"/>
+              </a:lnSpc>
+            </a:pPr>
+            <a:r>
+              <a:rPr sz="2400" b="1">
+                <a:solidFill>
+                  <a:srgbClr val="FFFFFF"/>
+                </a:solidFill>
+                <a:latin typeface="맑은 고딕"/>
+                <a:ea typeface="맑은 고딕"/>
+              </a:rPr>
+              <a:t>문가영</a:t>
+            </a:r>
+          </a:p>
+        </p:txBody>
+      </p:sp>
+      <p:sp>
+        <p:nvSpPr>
+          <p:cNvPr id="5" name="텍스트"/>
+          <p:cNvSpPr txBox="1"/>
           <p:nvPr/>
-        </p:nvCxnSpPr>
+        </p:nvSpPr>
         <p:spPr>
           <a:xfrm>
-            <a:off x="2669760" y="378000"/>
-            <a:ext cx="89856" cy="89856"/>
+            <a:off x="252000" y="993600"/>
+            <a:ext cx="2160000" cy="152401"/>
           </a:xfrm>
-          <a:prstGeom prst="line">
+          <a:prstGeom prst="rect">
             <a:avLst/>
           </a:prstGeom>
-          <a:ln w="27648">
-            <a:solidFill>
-              <a:srgbClr val="709784"/>
-            </a:solidFill>
-          </a:ln>
+          <a:noFill/>
         </p:spPr>
-      </p:cxnSp>
+        <p:txBody>
+          <a:bodyPr wrap="square" lIns="0" rIns="0" tIns="0" bIns="0" anchor="t">
+            <a:spAutoFit/>
+          </a:bodyPr>
+          <a:lstStyle/>
+          <a:p>
+            <a:pPr algn="l">
+              <a:lnSpc>
+                <a:spcPts val="1160"/>
+              </a:lnSpc>
+            </a:pPr>
+            <a:r>
+              <a:rPr sz="800" b="0">
+                <a:solidFill>
+                  <a:srgbClr val="A3A9B5"/>
+                </a:solidFill>
+                <a:latin typeface="맑은 고딕"/>
+                <a:ea typeface="맑은 고딕"/>
+              </a:rPr>
+              <a:t>회사명 · 부서명</a:t>
+            </a:r>
+          </a:p>
+        </p:txBody>
+      </p:sp>
       <p:cxnSp>
         <p:nvCxnSpPr>
           <p:cNvPr id="6" name="Connector 5"/>
@@ -3205,71 +3256,29 @@
         </p:nvCxnSpPr>
         <p:spPr>
           <a:xfrm>
-            <a:off x="2856384" y="288144"/>
-            <a:ext cx="89856" cy="89856"/>
+            <a:off x="252000" y="1209600"/>
+            <a:ext cx="2736000" cy="0"/>
           </a:xfrm>
           <a:prstGeom prst="line">
             <a:avLst/>
           </a:prstGeom>
-          <a:ln w="27648">
+          <a:ln w="5760">
             <a:solidFill>
-              <a:srgbClr val="709784"/>
+              <a:srgbClr val="2A2F38"/>
             </a:solidFill>
           </a:ln>
         </p:spPr>
       </p:cxnSp>
-      <p:cxnSp>
-        <p:nvCxnSpPr>
-          <p:cNvPr id="7" name="Connector 6"/>
-          <p:cNvCxnSpPr/>
-          <p:nvPr/>
-        </p:nvCxnSpPr>
-        <p:spPr>
-          <a:xfrm flipH="1">
-            <a:off x="2856384" y="378000"/>
-            <a:ext cx="89856" cy="89856"/>
-          </a:xfrm>
-          <a:prstGeom prst="line">
-            <a:avLst/>
-          </a:prstGeom>
-          <a:ln w="27648">
-            <a:solidFill>
-              <a:srgbClr val="709784"/>
-            </a:solidFill>
-          </a:ln>
-        </p:spPr>
-      </p:cxnSp>
-      <p:cxnSp>
-        <p:nvCxnSpPr>
-          <p:cNvPr id="8" name="Connector 7"/>
-          <p:cNvCxnSpPr/>
-          <p:nvPr/>
-        </p:nvCxnSpPr>
-        <p:spPr>
-          <a:xfrm flipH="1">
-            <a:off x="2780352" y="260496"/>
-            <a:ext cx="55296" cy="235008"/>
-          </a:xfrm>
-          <a:prstGeom prst="line">
-            <a:avLst/>
-          </a:prstGeom>
-          <a:ln w="24192">
-            <a:solidFill>
-              <a:srgbClr val="40564B"/>
-            </a:solidFill>
-          </a:ln>
-        </p:spPr>
-      </p:cxnSp>
-      <p:sp>
-        <p:nvSpPr>
-          <p:cNvPr id="9" name="텍스트"/>
+      <p:sp>
+        <p:nvSpPr>
+          <p:cNvPr id="7" name="텍스트"/>
           <p:cNvSpPr txBox="1"/>
           <p:nvPr/>
         </p:nvSpPr>
         <p:spPr>
           <a:xfrm>
-            <a:off x="396000" y="223200"/>
-            <a:ext cx="2016000" cy="108000"/>
+            <a:off x="252000" y="1299600"/>
+            <a:ext cx="331200" cy="99061"/>
           </a:xfrm>
           <a:prstGeom prst="rect">
             <a:avLst/>
@@ -3284,32 +3293,32 @@
           <a:p>
             <a:pPr algn="l">
               <a:lnSpc>
-                <a:spcPts val="1087"/>
+                <a:spcPts val="754"/>
               </a:lnSpc>
             </a:pPr>
             <a:r>
-              <a:rPr sz="750" b="1" spc="150">
+              <a:rPr sz="520" b="1" spc="120">
                 <a:solidFill>
-                  <a:srgbClr val="B0B9B4"/>
+                  <a:srgbClr val="A3A9B5"/>
                 </a:solidFill>
                 <a:latin typeface="맑은 고딕"/>
                 <a:ea typeface="맑은 고딕"/>
               </a:rPr>
-              <a:t>회사명 · 부서명</a:t>
-            </a:r>
-          </a:p>
-        </p:txBody>
-      </p:sp>
-      <p:sp>
-        <p:nvSpPr>
-          <p:cNvPr id="10" name="텍스트"/>
+              <a:t>TEL</a:t>
+            </a:r>
+          </a:p>
+        </p:txBody>
+      </p:sp>
+      <p:sp>
+        <p:nvSpPr>
+          <p:cNvPr id="8" name="텍스트"/>
           <p:cNvSpPr txBox="1"/>
           <p:nvPr/>
         </p:nvSpPr>
         <p:spPr>
           <a:xfrm>
-            <a:off x="396000" y="540000"/>
-            <a:ext cx="2160000" cy="313692"/>
+            <a:off x="583200" y="1288800"/>
+            <a:ext cx="1512000" cy="129541"/>
           </a:xfrm>
           <a:prstGeom prst="rect">
             <a:avLst/>
@@ -3324,160 +3333,11 @@
           <a:p>
             <a:pPr algn="l">
               <a:lnSpc>
-                <a:spcPts val="2755"/>
+                <a:spcPts val="986"/>
               </a:lnSpc>
             </a:pPr>
             <a:r>
-              <a:rPr sz="1900" b="1" spc="50">
-                <a:solidFill>
-                  <a:srgbClr val="FFFFFF"/>
-                </a:solidFill>
-                <a:latin typeface="맑은 고딕"/>
-                <a:ea typeface="맑은 고딕"/>
-              </a:rPr>
-              <a:t>문가영</a:t>
-            </a:r>
-          </a:p>
-        </p:txBody>
-      </p:sp>
-      <p:sp>
-        <p:nvSpPr>
-          <p:cNvPr id="11" name="텍스트"/>
-          <p:cNvSpPr txBox="1"/>
-          <p:nvPr/>
-        </p:nvSpPr>
-        <p:spPr>
-          <a:xfrm>
-            <a:off x="396000" y="835200"/>
-            <a:ext cx="2160000" cy="129600"/>
-          </a:xfrm>
-          <a:prstGeom prst="rect">
-            <a:avLst/>
-          </a:prstGeom>
-          <a:noFill/>
-        </p:spPr>
-        <p:txBody>
-          <a:bodyPr wrap="square" lIns="0" rIns="0" tIns="0" bIns="0" anchor="t">
-            <a:spAutoFit/>
-          </a:bodyPr>
-          <a:lstStyle/>
-          <a:p>
-            <a:pPr algn="l">
-              <a:lnSpc>
-                <a:spcPts val="1232"/>
-              </a:lnSpc>
-            </a:pPr>
-            <a:r>
-              <a:rPr sz="850" b="1">
-                <a:solidFill>
-                  <a:srgbClr val="7EA190"/>
-                </a:solidFill>
-                <a:latin typeface="맑은 고딕"/>
-                <a:ea typeface="맑은 고딕"/>
-              </a:rPr>
-              <a:t>영업팀 대리</a:t>
-            </a:r>
-          </a:p>
-        </p:txBody>
-      </p:sp>
-      <p:sp>
-        <p:nvSpPr>
-          <p:cNvPr id="12" name="Rectangle 11"/>
-          <p:cNvSpPr/>
-          <p:nvPr/>
-        </p:nvSpPr>
-        <p:spPr>
-          <a:xfrm>
-            <a:off x="396000" y="1051200"/>
-            <a:ext cx="230400" cy="14400"/>
-          </a:xfrm>
-          <a:prstGeom prst="rect">
-            <a:avLst/>
-          </a:prstGeom>
-          <a:solidFill>
-            <a:srgbClr val="709784"/>
-          </a:solidFill>
-          <a:ln>
-            <a:noFill/>
-          </a:ln>
-        </p:spPr>
-        <p:txBody>
-          <a:bodyPr rtlCol="0" anchor="ctr"/>
-          <a:lstStyle/>
-          <a:p>
-            <a:pPr algn="ctr"/>
-          </a:p>
-        </p:txBody>
-      </p:sp>
-      <p:sp>
-        <p:nvSpPr>
-          <p:cNvPr id="13" name="텍스트"/>
-          <p:cNvSpPr txBox="1"/>
-          <p:nvPr/>
-        </p:nvSpPr>
-        <p:spPr>
-          <a:xfrm>
-            <a:off x="396000" y="1188000"/>
-            <a:ext cx="122400" cy="168911"/>
-          </a:xfrm>
-          <a:prstGeom prst="rect">
-            <a:avLst/>
-          </a:prstGeom>
-          <a:noFill/>
-        </p:spPr>
-        <p:txBody>
-          <a:bodyPr wrap="square" lIns="0" rIns="0" tIns="0" bIns="0" anchor="t">
-            <a:spAutoFit/>
-          </a:bodyPr>
-          <a:lstStyle/>
-          <a:p>
-            <a:pPr algn="l">
-              <a:lnSpc>
-                <a:spcPts val="1015"/>
-              </a:lnSpc>
-            </a:pPr>
-            <a:r>
-              <a:rPr sz="700" b="1">
-                <a:solidFill>
-                  <a:srgbClr val="7EA190"/>
-                </a:solidFill>
-                <a:latin typeface="맑은 고딕"/>
-                <a:ea typeface="맑은 고딕"/>
-              </a:rPr>
-              <a:t>T</a:t>
-            </a:r>
-          </a:p>
-        </p:txBody>
-      </p:sp>
-      <p:sp>
-        <p:nvSpPr>
-          <p:cNvPr id="14" name="텍스트"/>
-          <p:cNvSpPr txBox="1"/>
-          <p:nvPr/>
-        </p:nvSpPr>
-        <p:spPr>
-          <a:xfrm>
-            <a:off x="540000" y="1188000"/>
-            <a:ext cx="1872000" cy="168911"/>
-          </a:xfrm>
-          <a:prstGeom prst="rect">
-            <a:avLst/>
-          </a:prstGeom>
-          <a:noFill/>
-        </p:spPr>
-        <p:txBody>
-          <a:bodyPr wrap="square" lIns="0" rIns="0" tIns="0" bIns="0" anchor="t">
-            <a:spAutoFit/>
-          </a:bodyPr>
-          <a:lstStyle/>
-          <a:p>
-            <a:pPr algn="l">
-              <a:lnSpc>
-                <a:spcPts val="1015"/>
-              </a:lnSpc>
-            </a:pPr>
-            <a:r>
-              <a:rPr sz="700" b="0">
+              <a:rPr sz="680" b="0">
                 <a:solidFill>
                   <a:srgbClr val="FFFFFF"/>
                 </a:solidFill>
@@ -3491,14 +3351,14 @@
       </p:sp>
       <p:sp>
         <p:nvSpPr>
-          <p:cNvPr id="15" name="텍스트"/>
+          <p:cNvPr id="9" name="텍스트"/>
           <p:cNvSpPr txBox="1"/>
           <p:nvPr/>
         </p:nvSpPr>
         <p:spPr>
           <a:xfrm>
-            <a:off x="396000" y="1356911"/>
-            <a:ext cx="122400" cy="168911"/>
+            <a:off x="252000" y="1429200"/>
+            <a:ext cx="331200" cy="99061"/>
           </a:xfrm>
           <a:prstGeom prst="rect">
             <a:avLst/>
@@ -3513,32 +3373,32 @@
           <a:p>
             <a:pPr algn="l">
               <a:lnSpc>
-                <a:spcPts val="1015"/>
+                <a:spcPts val="754"/>
               </a:lnSpc>
             </a:pPr>
             <a:r>
-              <a:rPr sz="700" b="1">
+              <a:rPr sz="520" b="1" spc="120">
                 <a:solidFill>
-                  <a:srgbClr val="7EA190"/>
+                  <a:srgbClr val="A3A9B5"/>
                 </a:solidFill>
                 <a:latin typeface="맑은 고딕"/>
                 <a:ea typeface="맑은 고딕"/>
               </a:rPr>
-              <a:t>E</a:t>
-            </a:r>
-          </a:p>
-        </p:txBody>
-      </p:sp>
-      <p:sp>
-        <p:nvSpPr>
-          <p:cNvPr id="16" name="텍스트"/>
+              <a:t>MAIL</a:t>
+            </a:r>
+          </a:p>
+        </p:txBody>
+      </p:sp>
+      <p:sp>
+        <p:nvSpPr>
+          <p:cNvPr id="10" name="텍스트"/>
           <p:cNvSpPr txBox="1"/>
           <p:nvPr/>
         </p:nvSpPr>
         <p:spPr>
           <a:xfrm>
-            <a:off x="540000" y="1356911"/>
-            <a:ext cx="1872000" cy="168911"/>
+            <a:off x="583200" y="1418400"/>
+            <a:ext cx="1512000" cy="129541"/>
           </a:xfrm>
           <a:prstGeom prst="rect">
             <a:avLst/>
@@ -3553,11 +3413,11 @@
           <a:p>
             <a:pPr algn="l">
               <a:lnSpc>
-                <a:spcPts val="1015"/>
+                <a:spcPts val="986"/>
               </a:lnSpc>
             </a:pPr>
             <a:r>
-              <a:rPr sz="700" b="0">
+              <a:rPr sz="680" b="0">
                 <a:solidFill>
                   <a:srgbClr val="FFFFFF"/>
                 </a:solidFill>
@@ -3571,14 +3431,14 @@
       </p:sp>
       <p:sp>
         <p:nvSpPr>
-          <p:cNvPr id="17" name="텍스트"/>
+          <p:cNvPr id="11" name="텍스트"/>
           <p:cNvSpPr txBox="1"/>
           <p:nvPr/>
         </p:nvSpPr>
         <p:spPr>
           <a:xfrm>
-            <a:off x="396000" y="1525822"/>
-            <a:ext cx="122400" cy="168911"/>
+            <a:off x="252000" y="1558800"/>
+            <a:ext cx="331200" cy="99061"/>
           </a:xfrm>
           <a:prstGeom prst="rect">
             <a:avLst/>
@@ -3593,32 +3453,32 @@
           <a:p>
             <a:pPr algn="l">
               <a:lnSpc>
-                <a:spcPts val="1015"/>
+                <a:spcPts val="754"/>
               </a:lnSpc>
             </a:pPr>
             <a:r>
-              <a:rPr sz="700" b="1">
+              <a:rPr sz="520" b="1" spc="120">
                 <a:solidFill>
-                  <a:srgbClr val="7EA190"/>
+                  <a:srgbClr val="A3A9B5"/>
                 </a:solidFill>
                 <a:latin typeface="맑은 고딕"/>
                 <a:ea typeface="맑은 고딕"/>
               </a:rPr>
-              <a:t>A</a:t>
-            </a:r>
-          </a:p>
-        </p:txBody>
-      </p:sp>
-      <p:sp>
-        <p:nvSpPr>
-          <p:cNvPr id="18" name="텍스트"/>
+              <a:t>ADDR</a:t>
+            </a:r>
+          </a:p>
+        </p:txBody>
+      </p:sp>
+      <p:sp>
+        <p:nvSpPr>
+          <p:cNvPr id="12" name="텍스트"/>
           <p:cNvSpPr txBox="1"/>
           <p:nvPr/>
         </p:nvSpPr>
         <p:spPr>
           <a:xfrm>
-            <a:off x="540000" y="1525822"/>
-            <a:ext cx="1872000" cy="168911"/>
+            <a:off x="583200" y="1548000"/>
+            <a:ext cx="1512000" cy="129541"/>
           </a:xfrm>
           <a:prstGeom prst="rect">
             <a:avLst/>
@@ -3633,11 +3493,11 @@
           <a:p>
             <a:pPr algn="l">
               <a:lnSpc>
-                <a:spcPts val="1015"/>
+                <a:spcPts val="986"/>
               </a:lnSpc>
             </a:pPr>
             <a:r>
-              <a:rPr sz="700" b="0">
+              <a:rPr sz="680" b="0">
                 <a:solidFill>
                   <a:srgbClr val="FFFFFF"/>
                 </a:solidFill>
@@ -3663,7 +3523,7 @@
     <p:bg>
       <p:bgPr>
         <a:solidFill>
-          <a:srgbClr val="F2F8F5"/>
+          <a:srgbClr val="FFFFFF"/>
         </a:solidFill>
         <a:effectLst/>
       </p:bgPr>
@@ -3684,13 +3544,13 @@
         <p:spPr>
           <a:xfrm>
             <a:off x="0" y="0"/>
-            <a:ext cx="64800" cy="1800000"/>
+            <a:ext cx="3240000" cy="1800000"/>
           </a:xfrm>
           <a:prstGeom prst="rect">
             <a:avLst/>
           </a:prstGeom>
           <a:solidFill>
-            <a:srgbClr val="396F54"/>
+            <a:srgbClr val="FF3B6B"/>
           </a:solidFill>
           <a:ln>
             <a:noFill/>
@@ -3706,14 +3566,130 @@
       </p:sp>
       <p:sp>
         <p:nvSpPr>
-          <p:cNvPr id="3" name="텍스트"/>
+          <p:cNvPr id="3" name="Freeform 2"/>
+          <p:cNvSpPr/>
+          <p:nvPr/>
+        </p:nvSpPr>
+        <p:spPr>
+          <a:xfrm>
+            <a:off x="2412000" y="972000"/>
+            <a:ext cx="828000" cy="828000"/>
+          </a:xfrm>
+          <a:custGeom>
+            <a:avLst/>
+            <a:gdLst/>
+            <a:ahLst/>
+            <a:cxnLst/>
+            <a:rect l="l" t="t" r="r" b="b"/>
+            <a:pathLst>
+              <a:path w="828000" h="828000">
+                <a:moveTo>
+                  <a:pt x="828000" y="828000"/>
+                </a:moveTo>
+                <a:lnTo>
+                  <a:pt x="0" y="828000"/>
+                </a:lnTo>
+                <a:lnTo>
+                  <a:pt x="1773" y="773846"/>
+                </a:lnTo>
+                <a:lnTo>
+                  <a:pt x="7084" y="719924"/>
+                </a:lnTo>
+                <a:lnTo>
+                  <a:pt x="15910" y="666465"/>
+                </a:lnTo>
+                <a:lnTo>
+                  <a:pt x="28213" y="613698"/>
+                </a:lnTo>
+                <a:lnTo>
+                  <a:pt x="43942" y="561848"/>
+                </a:lnTo>
+                <a:lnTo>
+                  <a:pt x="63028" y="511138"/>
+                </a:lnTo>
+                <a:lnTo>
+                  <a:pt x="85389" y="461785"/>
+                </a:lnTo>
+                <a:lnTo>
+                  <a:pt x="110931" y="414000"/>
+                </a:lnTo>
+                <a:lnTo>
+                  <a:pt x="139543" y="367988"/>
+                </a:lnTo>
+                <a:lnTo>
+                  <a:pt x="171103" y="323946"/>
+                </a:lnTo>
+                <a:lnTo>
+                  <a:pt x="205477" y="282062"/>
+                </a:lnTo>
+                <a:lnTo>
+                  <a:pt x="242516" y="242516"/>
+                </a:lnTo>
+                <a:lnTo>
+                  <a:pt x="282062" y="205477"/>
+                </a:lnTo>
+                <a:lnTo>
+                  <a:pt x="323946" y="171103"/>
+                </a:lnTo>
+                <a:lnTo>
+                  <a:pt x="367988" y="139543"/>
+                </a:lnTo>
+                <a:lnTo>
+                  <a:pt x="414000" y="110931"/>
+                </a:lnTo>
+                <a:lnTo>
+                  <a:pt x="461785" y="85389"/>
+                </a:lnTo>
+                <a:lnTo>
+                  <a:pt x="511138" y="63028"/>
+                </a:lnTo>
+                <a:lnTo>
+                  <a:pt x="561848" y="43942"/>
+                </a:lnTo>
+                <a:lnTo>
+                  <a:pt x="613698" y="28213"/>
+                </a:lnTo>
+                <a:lnTo>
+                  <a:pt x="666465" y="15910"/>
+                </a:lnTo>
+                <a:lnTo>
+                  <a:pt x="719924" y="7084"/>
+                </a:lnTo>
+                <a:lnTo>
+                  <a:pt x="773846" y="1773"/>
+                </a:lnTo>
+                <a:lnTo>
+                  <a:pt x="828000" y="0"/>
+                </a:lnTo>
+                <a:close/>
+              </a:path>
+            </a:pathLst>
+          </a:custGeom>
+          <a:solidFill>
+            <a:srgbClr val="FF668C"/>
+          </a:solidFill>
+          <a:ln>
+            <a:noFill/>
+          </a:ln>
+        </p:spPr>
+        <p:txBody>
+          <a:bodyPr rtlCol="0" anchor="ctr"/>
+          <a:lstStyle/>
+          <a:p>
+            <a:pPr algn="ctr"/>
+          </a:p>
+        </p:txBody>
+      </p:sp>
+      <p:sp>
+        <p:nvSpPr>
+          <p:cNvPr id="4" name="텍스트"/>
           <p:cNvSpPr txBox="1"/>
           <p:nvPr/>
         </p:nvSpPr>
         <p:spPr>
           <a:xfrm>
             <a:off x="252000" y="432000"/>
-            <a:ext cx="2016000" cy="252000"/>
+            <a:ext cx="2304000" cy="720000"/>
           </a:xfrm>
           <a:prstGeom prst="rect">
             <a:avLst/>
@@ -3728,32 +3704,49 @@
           <a:p>
             <a:pPr algn="l">
               <a:lnSpc>
-                <a:spcPts val="2465"/>
+                <a:spcPts val="1884"/>
               </a:lnSpc>
             </a:pPr>
             <a:r>
-              <a:rPr sz="1700" b="1">
+              <a:rPr sz="1300" b="1">
                 <a:solidFill>
-                  <a:srgbClr val="1C3629"/>
+                  <a:srgbClr val="FFFFFF"/>
                 </a:solidFill>
                 <a:latin typeface="맑은 고딕"/>
                 <a:ea typeface="맑은 고딕"/>
               </a:rPr>
-              <a:t>회사명 · 부서명</a:t>
-            </a:r>
-          </a:p>
-        </p:txBody>
-      </p:sp>
-      <p:sp>
-        <p:nvSpPr>
-          <p:cNvPr id="4" name="텍스트"/>
+              <a:t>믿고 맡길 수 있는</a:t>
+            </a:r>
+          </a:p>
+          <a:p>
+            <a:pPr algn="l">
+              <a:lnSpc>
+                <a:spcPts val="1884"/>
+              </a:lnSpc>
+            </a:pPr>
+            <a:r>
+              <a:rPr sz="1300" b="1">
+                <a:solidFill>
+                  <a:srgbClr val="FFFFFF"/>
+                </a:solidFill>
+                <a:latin typeface="맑은 고딕"/>
+                <a:ea typeface="맑은 고딕"/>
+              </a:rPr>
+              <a:t>사람이 되겠습니다</a:t>
+            </a:r>
+          </a:p>
+        </p:txBody>
+      </p:sp>
+      <p:sp>
+        <p:nvSpPr>
+          <p:cNvPr id="5" name="텍스트"/>
           <p:cNvSpPr txBox="1"/>
           <p:nvPr/>
         </p:nvSpPr>
         <p:spPr>
           <a:xfrm>
-            <a:off x="252000" y="878400"/>
-            <a:ext cx="2016000" cy="540000"/>
+            <a:off x="252000" y="1476000"/>
+            <a:ext cx="1800000" cy="133351"/>
           </a:xfrm>
           <a:prstGeom prst="rect">
             <a:avLst/>
@@ -3768,226 +3761,22 @@
           <a:p>
             <a:pPr algn="l">
               <a:lnSpc>
-                <a:spcPts val="1232"/>
+                <a:spcPts val="1015"/>
               </a:lnSpc>
             </a:pPr>
             <a:r>
-              <a:rPr sz="850" b="0">
+              <a:rPr sz="700" b="1" spc="200">
                 <a:solidFill>
-                  <a:srgbClr val="62746A"/>
+                  <a:srgbClr val="FFFFFF"/>
                 </a:solidFill>
                 <a:latin typeface="맑은 고딕"/>
                 <a:ea typeface="맑은 고딕"/>
               </a:rPr>
-              <a:t>믿고 맡길 수 있는 사람이 되겠습니다</a:t>
-            </a:r>
-          </a:p>
-        </p:txBody>
-      </p:sp>
-      <p:sp>
-        <p:nvSpPr>
-          <p:cNvPr id="5" name="Rectangle 4"/>
-          <p:cNvSpPr/>
-          <p:nvPr/>
-        </p:nvSpPr>
-        <p:spPr>
-          <a:xfrm>
-            <a:off x="2520000" y="1080000"/>
-            <a:ext cx="504000" cy="504000"/>
-          </a:xfrm>
-          <a:prstGeom prst="rect">
-            <a:avLst/>
-          </a:prstGeom>
-          <a:noFill/>
-          <a:ln w="9000">
-            <a:solidFill>
-              <a:srgbClr val="396F54"/>
-            </a:solidFill>
-            <a:prstDash val="dash"/>
-          </a:ln>
-        </p:spPr>
-        <p:txBody>
-          <a:bodyPr rtlCol="0" anchor="ctr"/>
-          <a:lstStyle/>
-          <a:p>
-            <a:pPr algn="ctr"/>
-          </a:p>
-        </p:txBody>
-      </p:sp>
-      <p:sp>
-        <p:nvSpPr>
-          <p:cNvPr id="6" name="텍스트"/>
-          <p:cNvSpPr txBox="1"/>
-          <p:nvPr/>
-        </p:nvSpPr>
-        <p:spPr>
-          <a:xfrm>
-            <a:off x="2520000" y="1080000"/>
-            <a:ext cx="504000" cy="504000"/>
-          </a:xfrm>
-          <a:prstGeom prst="rect">
-            <a:avLst/>
-          </a:prstGeom>
-          <a:noFill/>
-        </p:spPr>
-        <p:txBody>
-          <a:bodyPr wrap="square" lIns="0" rIns="0" tIns="0" bIns="0" anchor="ctr">
-            <a:spAutoFit/>
-          </a:bodyPr>
-          <a:lstStyle/>
-          <a:p>
-            <a:pPr algn="ctr">
-              <a:lnSpc>
-                <a:spcPts val="1305"/>
-              </a:lnSpc>
-            </a:pPr>
-            <a:r>
-              <a:rPr sz="900" b="1">
-                <a:solidFill>
-                  <a:srgbClr val="62746A"/>
-                </a:solidFill>
-                <a:latin typeface="맑은 고딕"/>
-                <a:ea typeface="맑은 고딕"/>
-              </a:rPr>
-              <a:t>QR</a:t>
-            </a:r>
-          </a:p>
-        </p:txBody>
-      </p:sp>
-      <p:sp>
-        <p:nvSpPr>
-          <p:cNvPr id="7" name="Rectangle 6"/>
-          <p:cNvSpPr/>
-          <p:nvPr/>
-        </p:nvSpPr>
-        <p:spPr>
-          <a:xfrm>
-            <a:off x="252000" y="763200"/>
-            <a:ext cx="201600" cy="14400"/>
-          </a:xfrm>
-          <a:prstGeom prst="rect">
-            <a:avLst/>
-          </a:prstGeom>
-          <a:solidFill>
-            <a:srgbClr val="396F54"/>
-          </a:solidFill>
-          <a:ln>
-            <a:noFill/>
-          </a:ln>
-        </p:spPr>
-        <p:txBody>
-          <a:bodyPr rtlCol="0" anchor="ctr"/>
-          <a:lstStyle/>
-          <a:p>
-            <a:pPr algn="ctr"/>
-          </a:p>
-        </p:txBody>
-      </p:sp>
-      <p:cxnSp>
-        <p:nvCxnSpPr>
-          <p:cNvPr id="8" name="Connector 7"/>
-          <p:cNvCxnSpPr/>
-          <p:nvPr/>
-        </p:nvCxnSpPr>
-        <p:spPr>
-          <a:xfrm flipH="1">
-            <a:off x="2642400" y="347760"/>
-            <a:ext cx="84240" cy="84240"/>
-          </a:xfrm>
-          <a:prstGeom prst="line">
-            <a:avLst/>
-          </a:prstGeom>
-          <a:ln w="25920">
-            <a:solidFill>
-              <a:srgbClr val="396F54"/>
-            </a:solidFill>
-          </a:ln>
-        </p:spPr>
-      </p:cxnSp>
-      <p:cxnSp>
-        <p:nvCxnSpPr>
-          <p:cNvPr id="9" name="Connector 8"/>
-          <p:cNvCxnSpPr/>
-          <p:nvPr/>
-        </p:nvCxnSpPr>
-        <p:spPr>
-          <a:xfrm>
-            <a:off x="2642400" y="432000"/>
-            <a:ext cx="84240" cy="84240"/>
-          </a:xfrm>
-          <a:prstGeom prst="line">
-            <a:avLst/>
-          </a:prstGeom>
-          <a:ln w="25920">
-            <a:solidFill>
-              <a:srgbClr val="396F54"/>
-            </a:solidFill>
-          </a:ln>
-        </p:spPr>
-      </p:cxnSp>
-      <p:cxnSp>
-        <p:nvCxnSpPr>
-          <p:cNvPr id="10" name="Connector 9"/>
-          <p:cNvCxnSpPr/>
-          <p:nvPr/>
-        </p:nvCxnSpPr>
-        <p:spPr>
-          <a:xfrm>
-            <a:off x="2817360" y="347760"/>
-            <a:ext cx="84240" cy="84240"/>
-          </a:xfrm>
-          <a:prstGeom prst="line">
-            <a:avLst/>
-          </a:prstGeom>
-          <a:ln w="25920">
-            <a:solidFill>
-              <a:srgbClr val="396F54"/>
-            </a:solidFill>
-          </a:ln>
-        </p:spPr>
-      </p:cxnSp>
-      <p:cxnSp>
-        <p:nvCxnSpPr>
-          <p:cNvPr id="11" name="Connector 10"/>
-          <p:cNvCxnSpPr/>
-          <p:nvPr/>
-        </p:nvCxnSpPr>
-        <p:spPr>
-          <a:xfrm flipH="1">
-            <a:off x="2817360" y="432000"/>
-            <a:ext cx="84240" cy="84240"/>
-          </a:xfrm>
-          <a:prstGeom prst="line">
-            <a:avLst/>
-          </a:prstGeom>
-          <a:ln w="25920">
-            <a:solidFill>
-              <a:srgbClr val="396F54"/>
-            </a:solidFill>
-          </a:ln>
-        </p:spPr>
-      </p:cxnSp>
-      <p:cxnSp>
-        <p:nvCxnSpPr>
-          <p:cNvPr id="12" name="Connector 11"/>
-          <p:cNvCxnSpPr/>
-          <p:nvPr/>
-        </p:nvCxnSpPr>
-        <p:spPr>
-          <a:xfrm flipH="1">
-            <a:off x="2746080" y="321840"/>
-            <a:ext cx="51840" cy="220320"/>
-          </a:xfrm>
-          <a:prstGeom prst="line">
-            <a:avLst/>
-          </a:prstGeom>
-          <a:ln w="22680">
-            <a:solidFill>
-              <a:srgbClr val="E2F2E9"/>
-            </a:solidFill>
-          </a:ln>
-        </p:spPr>
-      </p:cxnSp>
+              <a:t>회사명 · 부서명</a:t>
+            </a:r>
+          </a:p>
+        </p:txBody>
+      </p:sp>
     </p:spTree>
   </p:cSld>
   <p:clrMapOvr>

--- a/public/fun/cards/office/office-21.pptx
+++ b/public/fun/cards/office/office-21.pptx
@@ -3099,19 +3099,17 @@
       <p:grpSpPr/>
       <p:sp>
         <p:nvSpPr>
-          <p:cNvPr id="2" name="Rounded Rectangle 1"/>
+          <p:cNvPr id="2" name="Oval 1"/>
           <p:cNvSpPr/>
           <p:nvPr/>
         </p:nvSpPr>
         <p:spPr>
           <a:xfrm>
-            <a:off x="252000" y="230400"/>
-            <a:ext cx="899704" cy="180000"/>
-          </a:xfrm>
-          <a:prstGeom prst="roundRect">
-            <a:avLst>
-              <a:gd name="adj" fmla="val 50000"/>
-            </a:avLst>
+            <a:off x="2658960" y="239760"/>
+            <a:ext cx="24480" cy="24480"/>
+          </a:xfrm>
+          <a:prstGeom prst="ellipse">
+            <a:avLst/>
           </a:prstGeom>
           <a:solidFill>
             <a:srgbClr val="FF3B6B"/>
@@ -3130,14 +3128,596 @@
       </p:sp>
       <p:sp>
         <p:nvSpPr>
-          <p:cNvPr id="3" name="텍스트"/>
+          <p:cNvPr id="3" name="Oval 2"/>
+          <p:cNvSpPr/>
+          <p:nvPr/>
+        </p:nvSpPr>
+        <p:spPr>
+          <a:xfrm>
+            <a:off x="2658960" y="333360"/>
+            <a:ext cx="24480" cy="24480"/>
+          </a:xfrm>
+          <a:prstGeom prst="ellipse">
+            <a:avLst/>
+          </a:prstGeom>
+          <a:solidFill>
+            <a:srgbClr val="2A2F38"/>
+          </a:solidFill>
+          <a:ln>
+            <a:noFill/>
+          </a:ln>
+        </p:spPr>
+        <p:txBody>
+          <a:bodyPr rtlCol="0" anchor="ctr"/>
+          <a:lstStyle/>
+          <a:p>
+            <a:pPr algn="ctr"/>
+          </a:p>
+        </p:txBody>
+      </p:sp>
+      <p:sp>
+        <p:nvSpPr>
+          <p:cNvPr id="4" name="Oval 3"/>
+          <p:cNvSpPr/>
+          <p:nvPr/>
+        </p:nvSpPr>
+        <p:spPr>
+          <a:xfrm>
+            <a:off x="2658960" y="426960"/>
+            <a:ext cx="24480" cy="24480"/>
+          </a:xfrm>
+          <a:prstGeom prst="ellipse">
+            <a:avLst/>
+          </a:prstGeom>
+          <a:solidFill>
+            <a:srgbClr val="2A2F38"/>
+          </a:solidFill>
+          <a:ln>
+            <a:noFill/>
+          </a:ln>
+        </p:spPr>
+        <p:txBody>
+          <a:bodyPr rtlCol="0" anchor="ctr"/>
+          <a:lstStyle/>
+          <a:p>
+            <a:pPr algn="ctr"/>
+          </a:p>
+        </p:txBody>
+      </p:sp>
+      <p:sp>
+        <p:nvSpPr>
+          <p:cNvPr id="5" name="Oval 4"/>
+          <p:cNvSpPr/>
+          <p:nvPr/>
+        </p:nvSpPr>
+        <p:spPr>
+          <a:xfrm>
+            <a:off x="2658960" y="520560"/>
+            <a:ext cx="24480" cy="24480"/>
+          </a:xfrm>
+          <a:prstGeom prst="ellipse">
+            <a:avLst/>
+          </a:prstGeom>
+          <a:solidFill>
+            <a:srgbClr val="2A2F38"/>
+          </a:solidFill>
+          <a:ln>
+            <a:noFill/>
+          </a:ln>
+        </p:spPr>
+        <p:txBody>
+          <a:bodyPr rtlCol="0" anchor="ctr"/>
+          <a:lstStyle/>
+          <a:p>
+            <a:pPr algn="ctr"/>
+          </a:p>
+        </p:txBody>
+      </p:sp>
+      <p:sp>
+        <p:nvSpPr>
+          <p:cNvPr id="6" name="Oval 5"/>
+          <p:cNvSpPr/>
+          <p:nvPr/>
+        </p:nvSpPr>
+        <p:spPr>
+          <a:xfrm>
+            <a:off x="2752560" y="239760"/>
+            <a:ext cx="24480" cy="24480"/>
+          </a:xfrm>
+          <a:prstGeom prst="ellipse">
+            <a:avLst/>
+          </a:prstGeom>
+          <a:solidFill>
+            <a:srgbClr val="2A2F38"/>
+          </a:solidFill>
+          <a:ln>
+            <a:noFill/>
+          </a:ln>
+        </p:spPr>
+        <p:txBody>
+          <a:bodyPr rtlCol="0" anchor="ctr"/>
+          <a:lstStyle/>
+          <a:p>
+            <a:pPr algn="ctr"/>
+          </a:p>
+        </p:txBody>
+      </p:sp>
+      <p:sp>
+        <p:nvSpPr>
+          <p:cNvPr id="7" name="Oval 6"/>
+          <p:cNvSpPr/>
+          <p:nvPr/>
+        </p:nvSpPr>
+        <p:spPr>
+          <a:xfrm>
+            <a:off x="2752560" y="333360"/>
+            <a:ext cx="24480" cy="24480"/>
+          </a:xfrm>
+          <a:prstGeom prst="ellipse">
+            <a:avLst/>
+          </a:prstGeom>
+          <a:solidFill>
+            <a:srgbClr val="2A2F38"/>
+          </a:solidFill>
+          <a:ln>
+            <a:noFill/>
+          </a:ln>
+        </p:spPr>
+        <p:txBody>
+          <a:bodyPr rtlCol="0" anchor="ctr"/>
+          <a:lstStyle/>
+          <a:p>
+            <a:pPr algn="ctr"/>
+          </a:p>
+        </p:txBody>
+      </p:sp>
+      <p:sp>
+        <p:nvSpPr>
+          <p:cNvPr id="8" name="Oval 7"/>
+          <p:cNvSpPr/>
+          <p:nvPr/>
+        </p:nvSpPr>
+        <p:spPr>
+          <a:xfrm>
+            <a:off x="2752560" y="426960"/>
+            <a:ext cx="24480" cy="24480"/>
+          </a:xfrm>
+          <a:prstGeom prst="ellipse">
+            <a:avLst/>
+          </a:prstGeom>
+          <a:solidFill>
+            <a:srgbClr val="2A2F38"/>
+          </a:solidFill>
+          <a:ln>
+            <a:noFill/>
+          </a:ln>
+        </p:spPr>
+        <p:txBody>
+          <a:bodyPr rtlCol="0" anchor="ctr"/>
+          <a:lstStyle/>
+          <a:p>
+            <a:pPr algn="ctr"/>
+          </a:p>
+        </p:txBody>
+      </p:sp>
+      <p:sp>
+        <p:nvSpPr>
+          <p:cNvPr id="9" name="Oval 8"/>
+          <p:cNvSpPr/>
+          <p:nvPr/>
+        </p:nvSpPr>
+        <p:spPr>
+          <a:xfrm>
+            <a:off x="2752560" y="520560"/>
+            <a:ext cx="24480" cy="24480"/>
+          </a:xfrm>
+          <a:prstGeom prst="ellipse">
+            <a:avLst/>
+          </a:prstGeom>
+          <a:solidFill>
+            <a:srgbClr val="FF3B6B"/>
+          </a:solidFill>
+          <a:ln>
+            <a:noFill/>
+          </a:ln>
+        </p:spPr>
+        <p:txBody>
+          <a:bodyPr rtlCol="0" anchor="ctr"/>
+          <a:lstStyle/>
+          <a:p>
+            <a:pPr algn="ctr"/>
+          </a:p>
+        </p:txBody>
+      </p:sp>
+      <p:sp>
+        <p:nvSpPr>
+          <p:cNvPr id="10" name="Oval 9"/>
+          <p:cNvSpPr/>
+          <p:nvPr/>
+        </p:nvSpPr>
+        <p:spPr>
+          <a:xfrm>
+            <a:off x="2846160" y="239760"/>
+            <a:ext cx="24480" cy="24480"/>
+          </a:xfrm>
+          <a:prstGeom prst="ellipse">
+            <a:avLst/>
+          </a:prstGeom>
+          <a:solidFill>
+            <a:srgbClr val="2A2F38"/>
+          </a:solidFill>
+          <a:ln>
+            <a:noFill/>
+          </a:ln>
+        </p:spPr>
+        <p:txBody>
+          <a:bodyPr rtlCol="0" anchor="ctr"/>
+          <a:lstStyle/>
+          <a:p>
+            <a:pPr algn="ctr"/>
+          </a:p>
+        </p:txBody>
+      </p:sp>
+      <p:sp>
+        <p:nvSpPr>
+          <p:cNvPr id="11" name="Oval 10"/>
+          <p:cNvSpPr/>
+          <p:nvPr/>
+        </p:nvSpPr>
+        <p:spPr>
+          <a:xfrm>
+            <a:off x="2846160" y="333360"/>
+            <a:ext cx="24480" cy="24480"/>
+          </a:xfrm>
+          <a:prstGeom prst="ellipse">
+            <a:avLst/>
+          </a:prstGeom>
+          <a:solidFill>
+            <a:srgbClr val="2A2F38"/>
+          </a:solidFill>
+          <a:ln>
+            <a:noFill/>
+          </a:ln>
+        </p:spPr>
+        <p:txBody>
+          <a:bodyPr rtlCol="0" anchor="ctr"/>
+          <a:lstStyle/>
+          <a:p>
+            <a:pPr algn="ctr"/>
+          </a:p>
+        </p:txBody>
+      </p:sp>
+      <p:sp>
+        <p:nvSpPr>
+          <p:cNvPr id="12" name="Oval 11"/>
+          <p:cNvSpPr/>
+          <p:nvPr/>
+        </p:nvSpPr>
+        <p:spPr>
+          <a:xfrm>
+            <a:off x="2846160" y="426960"/>
+            <a:ext cx="24480" cy="24480"/>
+          </a:xfrm>
+          <a:prstGeom prst="ellipse">
+            <a:avLst/>
+          </a:prstGeom>
+          <a:solidFill>
+            <a:srgbClr val="FF3B6B"/>
+          </a:solidFill>
+          <a:ln>
+            <a:noFill/>
+          </a:ln>
+        </p:spPr>
+        <p:txBody>
+          <a:bodyPr rtlCol="0" anchor="ctr"/>
+          <a:lstStyle/>
+          <a:p>
+            <a:pPr algn="ctr"/>
+          </a:p>
+        </p:txBody>
+      </p:sp>
+      <p:sp>
+        <p:nvSpPr>
+          <p:cNvPr id="13" name="Oval 12"/>
+          <p:cNvSpPr/>
+          <p:nvPr/>
+        </p:nvSpPr>
+        <p:spPr>
+          <a:xfrm>
+            <a:off x="2846160" y="520560"/>
+            <a:ext cx="24480" cy="24480"/>
+          </a:xfrm>
+          <a:prstGeom prst="ellipse">
+            <a:avLst/>
+          </a:prstGeom>
+          <a:solidFill>
+            <a:srgbClr val="2A2F38"/>
+          </a:solidFill>
+          <a:ln>
+            <a:noFill/>
+          </a:ln>
+        </p:spPr>
+        <p:txBody>
+          <a:bodyPr rtlCol="0" anchor="ctr"/>
+          <a:lstStyle/>
+          <a:p>
+            <a:pPr algn="ctr"/>
+          </a:p>
+        </p:txBody>
+      </p:sp>
+      <p:sp>
+        <p:nvSpPr>
+          <p:cNvPr id="14" name="Oval 13"/>
+          <p:cNvSpPr/>
+          <p:nvPr/>
+        </p:nvSpPr>
+        <p:spPr>
+          <a:xfrm>
+            <a:off x="2939760" y="239760"/>
+            <a:ext cx="24480" cy="24480"/>
+          </a:xfrm>
+          <a:prstGeom prst="ellipse">
+            <a:avLst/>
+          </a:prstGeom>
+          <a:solidFill>
+            <a:srgbClr val="2A2F38"/>
+          </a:solidFill>
+          <a:ln>
+            <a:noFill/>
+          </a:ln>
+        </p:spPr>
+        <p:txBody>
+          <a:bodyPr rtlCol="0" anchor="ctr"/>
+          <a:lstStyle/>
+          <a:p>
+            <a:pPr algn="ctr"/>
+          </a:p>
+        </p:txBody>
+      </p:sp>
+      <p:sp>
+        <p:nvSpPr>
+          <p:cNvPr id="15" name="Oval 14"/>
+          <p:cNvSpPr/>
+          <p:nvPr/>
+        </p:nvSpPr>
+        <p:spPr>
+          <a:xfrm>
+            <a:off x="2939760" y="333360"/>
+            <a:ext cx="24480" cy="24480"/>
+          </a:xfrm>
+          <a:prstGeom prst="ellipse">
+            <a:avLst/>
+          </a:prstGeom>
+          <a:solidFill>
+            <a:srgbClr val="FF3B6B"/>
+          </a:solidFill>
+          <a:ln>
+            <a:noFill/>
+          </a:ln>
+        </p:spPr>
+        <p:txBody>
+          <a:bodyPr rtlCol="0" anchor="ctr"/>
+          <a:lstStyle/>
+          <a:p>
+            <a:pPr algn="ctr"/>
+          </a:p>
+        </p:txBody>
+      </p:sp>
+      <p:sp>
+        <p:nvSpPr>
+          <p:cNvPr id="16" name="Oval 15"/>
+          <p:cNvSpPr/>
+          <p:nvPr/>
+        </p:nvSpPr>
+        <p:spPr>
+          <a:xfrm>
+            <a:off x="2939760" y="426960"/>
+            <a:ext cx="24480" cy="24480"/>
+          </a:xfrm>
+          <a:prstGeom prst="ellipse">
+            <a:avLst/>
+          </a:prstGeom>
+          <a:solidFill>
+            <a:srgbClr val="2A2F38"/>
+          </a:solidFill>
+          <a:ln>
+            <a:noFill/>
+          </a:ln>
+        </p:spPr>
+        <p:txBody>
+          <a:bodyPr rtlCol="0" anchor="ctr"/>
+          <a:lstStyle/>
+          <a:p>
+            <a:pPr algn="ctr"/>
+          </a:p>
+        </p:txBody>
+      </p:sp>
+      <p:sp>
+        <p:nvSpPr>
+          <p:cNvPr id="17" name="Oval 16"/>
+          <p:cNvSpPr/>
+          <p:nvPr/>
+        </p:nvSpPr>
+        <p:spPr>
+          <a:xfrm>
+            <a:off x="2939760" y="520560"/>
+            <a:ext cx="24480" cy="24480"/>
+          </a:xfrm>
+          <a:prstGeom prst="ellipse">
+            <a:avLst/>
+          </a:prstGeom>
+          <a:solidFill>
+            <a:srgbClr val="2A2F38"/>
+          </a:solidFill>
+          <a:ln>
+            <a:noFill/>
+          </a:ln>
+        </p:spPr>
+        <p:txBody>
+          <a:bodyPr rtlCol="0" anchor="ctr"/>
+          <a:lstStyle/>
+          <a:p>
+            <a:pPr algn="ctr"/>
+          </a:p>
+        </p:txBody>
+      </p:sp>
+      <p:sp>
+        <p:nvSpPr>
+          <p:cNvPr id="18" name="Oval 17"/>
+          <p:cNvSpPr/>
+          <p:nvPr/>
+        </p:nvSpPr>
+        <p:spPr>
+          <a:xfrm>
+            <a:off x="3033360" y="239760"/>
+            <a:ext cx="24480" cy="24480"/>
+          </a:xfrm>
+          <a:prstGeom prst="ellipse">
+            <a:avLst/>
+          </a:prstGeom>
+          <a:solidFill>
+            <a:srgbClr val="FF3B6B"/>
+          </a:solidFill>
+          <a:ln>
+            <a:noFill/>
+          </a:ln>
+        </p:spPr>
+        <p:txBody>
+          <a:bodyPr rtlCol="0" anchor="ctr"/>
+          <a:lstStyle/>
+          <a:p>
+            <a:pPr algn="ctr"/>
+          </a:p>
+        </p:txBody>
+      </p:sp>
+      <p:sp>
+        <p:nvSpPr>
+          <p:cNvPr id="19" name="Oval 18"/>
+          <p:cNvSpPr/>
+          <p:nvPr/>
+        </p:nvSpPr>
+        <p:spPr>
+          <a:xfrm>
+            <a:off x="3033360" y="333360"/>
+            <a:ext cx="24480" cy="24480"/>
+          </a:xfrm>
+          <a:prstGeom prst="ellipse">
+            <a:avLst/>
+          </a:prstGeom>
+          <a:solidFill>
+            <a:srgbClr val="2A2F38"/>
+          </a:solidFill>
+          <a:ln>
+            <a:noFill/>
+          </a:ln>
+        </p:spPr>
+        <p:txBody>
+          <a:bodyPr rtlCol="0" anchor="ctr"/>
+          <a:lstStyle/>
+          <a:p>
+            <a:pPr algn="ctr"/>
+          </a:p>
+        </p:txBody>
+      </p:sp>
+      <p:sp>
+        <p:nvSpPr>
+          <p:cNvPr id="20" name="Oval 19"/>
+          <p:cNvSpPr/>
+          <p:nvPr/>
+        </p:nvSpPr>
+        <p:spPr>
+          <a:xfrm>
+            <a:off x="3033360" y="426960"/>
+            <a:ext cx="24480" cy="24480"/>
+          </a:xfrm>
+          <a:prstGeom prst="ellipse">
+            <a:avLst/>
+          </a:prstGeom>
+          <a:solidFill>
+            <a:srgbClr val="2A2F38"/>
+          </a:solidFill>
+          <a:ln>
+            <a:noFill/>
+          </a:ln>
+        </p:spPr>
+        <p:txBody>
+          <a:bodyPr rtlCol="0" anchor="ctr"/>
+          <a:lstStyle/>
+          <a:p>
+            <a:pPr algn="ctr"/>
+          </a:p>
+        </p:txBody>
+      </p:sp>
+      <p:sp>
+        <p:nvSpPr>
+          <p:cNvPr id="21" name="Oval 20"/>
+          <p:cNvSpPr/>
+          <p:nvPr/>
+        </p:nvSpPr>
+        <p:spPr>
+          <a:xfrm>
+            <a:off x="3033360" y="520560"/>
+            <a:ext cx="24480" cy="24480"/>
+          </a:xfrm>
+          <a:prstGeom prst="ellipse">
+            <a:avLst/>
+          </a:prstGeom>
+          <a:solidFill>
+            <a:srgbClr val="2A2F38"/>
+          </a:solidFill>
+          <a:ln>
+            <a:noFill/>
+          </a:ln>
+        </p:spPr>
+        <p:txBody>
+          <a:bodyPr rtlCol="0" anchor="ctr"/>
+          <a:lstStyle/>
+          <a:p>
+            <a:pPr algn="ctr"/>
+          </a:p>
+        </p:txBody>
+      </p:sp>
+      <p:sp>
+        <p:nvSpPr>
+          <p:cNvPr id="22" name="Rounded Rectangle 21"/>
+          <p:cNvSpPr/>
+          <p:nvPr/>
+        </p:nvSpPr>
+        <p:spPr>
+          <a:xfrm>
+            <a:off x="252000" y="237600"/>
+            <a:ext cx="799803" cy="165600"/>
+          </a:xfrm>
+          <a:prstGeom prst="roundRect">
+            <a:avLst>
+              <a:gd name="adj" fmla="val 50000"/>
+            </a:avLst>
+          </a:prstGeom>
+          <a:noFill/>
+          <a:ln w="5760">
+            <a:solidFill>
+              <a:srgbClr val="FF3B6B"/>
+            </a:solidFill>
+          </a:ln>
+        </p:spPr>
+        <p:txBody>
+          <a:bodyPr rtlCol="0" anchor="ctr"/>
+          <a:lstStyle/>
+          <a:p>
+            <a:pPr algn="ctr"/>
+          </a:p>
+        </p:txBody>
+      </p:sp>
+      <p:sp>
+        <p:nvSpPr>
+          <p:cNvPr id="23" name="텍스트"/>
           <p:cNvSpPr txBox="1"/>
           <p:nvPr/>
         </p:nvSpPr>
         <p:spPr>
           <a:xfrm>
-            <a:off x="252000" y="230400"/>
-            <a:ext cx="899704" cy="180000"/>
+            <a:off x="252000" y="237600"/>
+            <a:ext cx="799803" cy="165600"/>
           </a:xfrm>
           <a:prstGeom prst="rect">
             <a:avLst/>
@@ -3152,11 +3732,11 @@
           <a:p>
             <a:pPr algn="ctr">
               <a:lnSpc>
-                <a:spcPts val="1160"/>
+                <a:spcPts val="956"/>
               </a:lnSpc>
             </a:pPr>
             <a:r>
-              <a:rPr sz="800" b="1">
+              <a:rPr sz="660" b="1" spc="80">
                 <a:solidFill>
                   <a:srgbClr val="FFFFFF"/>
                 </a:solidFill>
@@ -3170,14 +3750,14 @@
       </p:sp>
       <p:sp>
         <p:nvSpPr>
-          <p:cNvPr id="4" name="텍스트"/>
+          <p:cNvPr id="24" name="텍스트"/>
           <p:cNvSpPr txBox="1"/>
           <p:nvPr/>
         </p:nvSpPr>
         <p:spPr>
           <a:xfrm>
-            <a:off x="252000" y="568800"/>
-            <a:ext cx="2520000" cy="396000"/>
+            <a:off x="252000" y="583200"/>
+            <a:ext cx="2160000" cy="237600"/>
           </a:xfrm>
           <a:prstGeom prst="rect">
             <a:avLst/>
@@ -3192,11 +3772,11 @@
           <a:p>
             <a:pPr algn="l">
               <a:lnSpc>
-                <a:spcPts val="3479"/>
+                <a:spcPts val="1957"/>
               </a:lnSpc>
             </a:pPr>
             <a:r>
-              <a:rPr sz="2400" b="1">
+              <a:rPr sz="1350" b="1" spc="120">
                 <a:solidFill>
                   <a:srgbClr val="FFFFFF"/>
                 </a:solidFill>
@@ -3210,14 +3790,14 @@
       </p:sp>
       <p:sp>
         <p:nvSpPr>
-          <p:cNvPr id="5" name="텍스트"/>
+          <p:cNvPr id="25" name="텍스트"/>
           <p:cNvSpPr txBox="1"/>
           <p:nvPr/>
         </p:nvSpPr>
         <p:spPr>
           <a:xfrm>
-            <a:off x="252000" y="993600"/>
-            <a:ext cx="2160000" cy="152401"/>
+            <a:off x="252000" y="878400"/>
+            <a:ext cx="1800000" cy="123826"/>
           </a:xfrm>
           <a:prstGeom prst="rect">
             <a:avLst/>
@@ -3232,11 +3812,11 @@
           <a:p>
             <a:pPr algn="l">
               <a:lnSpc>
-                <a:spcPts val="1160"/>
+                <a:spcPts val="942"/>
               </a:lnSpc>
             </a:pPr>
             <a:r>
-              <a:rPr sz="800" b="0">
+              <a:rPr sz="650" b="1" spc="220">
                 <a:solidFill>
                   <a:srgbClr val="A3A9B5"/>
                 </a:solidFill>
@@ -3250,19 +3830,19 @@
       </p:sp>
       <p:cxnSp>
         <p:nvCxnSpPr>
-          <p:cNvPr id="6" name="Connector 5"/>
+          <p:cNvPr id="26" name="Connector 25"/>
           <p:cNvCxnSpPr/>
           <p:nvPr/>
         </p:nvCxnSpPr>
         <p:spPr>
           <a:xfrm>
-            <a:off x="252000" y="1209600"/>
+            <a:off x="252000" y="1144800"/>
             <a:ext cx="2736000" cy="0"/>
           </a:xfrm>
           <a:prstGeom prst="line">
             <a:avLst/>
           </a:prstGeom>
-          <a:ln w="5760">
+          <a:ln w="3600">
             <a:solidFill>
               <a:srgbClr val="2A2F38"/>
             </a:solidFill>
@@ -3271,14 +3851,14 @@
       </p:cxnSp>
       <p:sp>
         <p:nvSpPr>
-          <p:cNvPr id="7" name="텍스트"/>
+          <p:cNvPr id="27" name="텍스트"/>
           <p:cNvSpPr txBox="1"/>
           <p:nvPr/>
         </p:nvSpPr>
         <p:spPr>
           <a:xfrm>
-            <a:off x="252000" y="1299600"/>
-            <a:ext cx="331200" cy="99061"/>
+            <a:off x="252000" y="1242000"/>
+            <a:ext cx="331200" cy="91441"/>
           </a:xfrm>
           <a:prstGeom prst="rect">
             <a:avLst/>
@@ -3293,11 +3873,11 @@
           <a:p>
             <a:pPr algn="l">
               <a:lnSpc>
-                <a:spcPts val="754"/>
+                <a:spcPts val="696"/>
               </a:lnSpc>
             </a:pPr>
             <a:r>
-              <a:rPr sz="520" b="1" spc="120">
+              <a:rPr sz="480" b="1" spc="140">
                 <a:solidFill>
                   <a:srgbClr val="A3A9B5"/>
                 </a:solidFill>
@@ -3311,14 +3891,14 @@
       </p:sp>
       <p:sp>
         <p:nvSpPr>
-          <p:cNvPr id="8" name="텍스트"/>
+          <p:cNvPr id="28" name="텍스트"/>
           <p:cNvSpPr txBox="1"/>
           <p:nvPr/>
         </p:nvSpPr>
         <p:spPr>
           <a:xfrm>
-            <a:off x="583200" y="1288800"/>
-            <a:ext cx="1512000" cy="129541"/>
+            <a:off x="583200" y="1231200"/>
+            <a:ext cx="1512000" cy="123826"/>
           </a:xfrm>
           <a:prstGeom prst="rect">
             <a:avLst/>
@@ -3333,11 +3913,11 @@
           <a:p>
             <a:pPr algn="l">
               <a:lnSpc>
-                <a:spcPts val="986"/>
+                <a:spcPts val="942"/>
               </a:lnSpc>
             </a:pPr>
             <a:r>
-              <a:rPr sz="680" b="0">
+              <a:rPr sz="650" b="0">
                 <a:solidFill>
                   <a:srgbClr val="FFFFFF"/>
                 </a:solidFill>
@@ -3351,14 +3931,14 @@
       </p:sp>
       <p:sp>
         <p:nvSpPr>
-          <p:cNvPr id="9" name="텍스트"/>
+          <p:cNvPr id="29" name="텍스트"/>
           <p:cNvSpPr txBox="1"/>
           <p:nvPr/>
         </p:nvSpPr>
         <p:spPr>
           <a:xfrm>
-            <a:off x="252000" y="1429200"/>
-            <a:ext cx="331200" cy="99061"/>
+            <a:off x="252000" y="1371600"/>
+            <a:ext cx="331200" cy="91441"/>
           </a:xfrm>
           <a:prstGeom prst="rect">
             <a:avLst/>
@@ -3373,11 +3953,11 @@
           <a:p>
             <a:pPr algn="l">
               <a:lnSpc>
-                <a:spcPts val="754"/>
+                <a:spcPts val="696"/>
               </a:lnSpc>
             </a:pPr>
             <a:r>
-              <a:rPr sz="520" b="1" spc="120">
+              <a:rPr sz="480" b="1" spc="140">
                 <a:solidFill>
                   <a:srgbClr val="A3A9B5"/>
                 </a:solidFill>
@@ -3391,14 +3971,14 @@
       </p:sp>
       <p:sp>
         <p:nvSpPr>
-          <p:cNvPr id="10" name="텍스트"/>
+          <p:cNvPr id="30" name="텍스트"/>
           <p:cNvSpPr txBox="1"/>
           <p:nvPr/>
         </p:nvSpPr>
         <p:spPr>
           <a:xfrm>
-            <a:off x="583200" y="1418400"/>
-            <a:ext cx="1512000" cy="129541"/>
+            <a:off x="583200" y="1360800"/>
+            <a:ext cx="1512000" cy="123826"/>
           </a:xfrm>
           <a:prstGeom prst="rect">
             <a:avLst/>
@@ -3413,11 +3993,11 @@
           <a:p>
             <a:pPr algn="l">
               <a:lnSpc>
-                <a:spcPts val="986"/>
+                <a:spcPts val="942"/>
               </a:lnSpc>
             </a:pPr>
             <a:r>
-              <a:rPr sz="680" b="0">
+              <a:rPr sz="650" b="0">
                 <a:solidFill>
                   <a:srgbClr val="FFFFFF"/>
                 </a:solidFill>
@@ -3431,14 +4011,14 @@
       </p:sp>
       <p:sp>
         <p:nvSpPr>
-          <p:cNvPr id="11" name="텍스트"/>
+          <p:cNvPr id="31" name="텍스트"/>
           <p:cNvSpPr txBox="1"/>
           <p:nvPr/>
         </p:nvSpPr>
         <p:spPr>
           <a:xfrm>
-            <a:off x="252000" y="1558800"/>
-            <a:ext cx="331200" cy="99061"/>
+            <a:off x="252000" y="1501200"/>
+            <a:ext cx="331200" cy="91441"/>
           </a:xfrm>
           <a:prstGeom prst="rect">
             <a:avLst/>
@@ -3453,11 +4033,11 @@
           <a:p>
             <a:pPr algn="l">
               <a:lnSpc>
-                <a:spcPts val="754"/>
+                <a:spcPts val="696"/>
               </a:lnSpc>
             </a:pPr>
             <a:r>
-              <a:rPr sz="520" b="1" spc="120">
+              <a:rPr sz="480" b="1" spc="140">
                 <a:solidFill>
                   <a:srgbClr val="A3A9B5"/>
                 </a:solidFill>
@@ -3471,14 +4051,14 @@
       </p:sp>
       <p:sp>
         <p:nvSpPr>
-          <p:cNvPr id="12" name="텍스트"/>
+          <p:cNvPr id="32" name="텍스트"/>
           <p:cNvSpPr txBox="1"/>
           <p:nvPr/>
         </p:nvSpPr>
         <p:spPr>
           <a:xfrm>
-            <a:off x="583200" y="1548000"/>
-            <a:ext cx="1512000" cy="129541"/>
+            <a:off x="583200" y="1490400"/>
+            <a:ext cx="1512000" cy="123826"/>
           </a:xfrm>
           <a:prstGeom prst="rect">
             <a:avLst/>
@@ -3493,11 +4073,11 @@
           <a:p>
             <a:pPr algn="l">
               <a:lnSpc>
-                <a:spcPts val="986"/>
+                <a:spcPts val="942"/>
               </a:lnSpc>
             </a:pPr>
             <a:r>
-              <a:rPr sz="680" b="0">
+              <a:rPr sz="650" b="0">
                 <a:solidFill>
                   <a:srgbClr val="FFFFFF"/>
                 </a:solidFill>
@@ -3509,6 +4089,48 @@
           </a:p>
         </p:txBody>
       </p:sp>
+      <p:cxnSp>
+        <p:nvCxnSpPr>
+          <p:cNvPr id="33" name="Connector 32"/>
+          <p:cNvCxnSpPr/>
+          <p:nvPr/>
+        </p:nvCxnSpPr>
+        <p:spPr>
+          <a:xfrm>
+            <a:off x="2955600" y="1584000"/>
+            <a:ext cx="64800" cy="0"/>
+          </a:xfrm>
+          <a:prstGeom prst="line">
+            <a:avLst/>
+          </a:prstGeom>
+          <a:ln w="3600">
+            <a:solidFill>
+              <a:srgbClr val="2A2F38"/>
+            </a:solidFill>
+          </a:ln>
+        </p:spPr>
+      </p:cxnSp>
+      <p:cxnSp>
+        <p:nvCxnSpPr>
+          <p:cNvPr id="34" name="Connector 33"/>
+          <p:cNvCxnSpPr/>
+          <p:nvPr/>
+        </p:nvCxnSpPr>
+        <p:spPr>
+          <a:xfrm>
+            <a:off x="2988000" y="1551600"/>
+            <a:ext cx="0" cy="64800"/>
+          </a:xfrm>
+          <a:prstGeom prst="line">
+            <a:avLst/>
+          </a:prstGeom>
+          <a:ln w="3600">
+            <a:solidFill>
+              <a:srgbClr val="2A2F38"/>
+            </a:solidFill>
+          </a:ln>
+        </p:spPr>
+      </p:cxnSp>
     </p:spTree>
   </p:cSld>
   <p:clrMapOvr>
@@ -3537,14 +4159,54 @@
       <p:grpSpPr/>
       <p:sp>
         <p:nvSpPr>
-          <p:cNvPr id="2" name="Rectangle 1"/>
+          <p:cNvPr id="2" name="텍스트"/>
+          <p:cNvSpPr txBox="1"/>
+          <p:nvPr/>
+        </p:nvSpPr>
+        <p:spPr>
+          <a:xfrm>
+            <a:off x="252000" y="252000"/>
+            <a:ext cx="1080000" cy="99061"/>
+          </a:xfrm>
+          <a:prstGeom prst="rect">
+            <a:avLst/>
+          </a:prstGeom>
+          <a:noFill/>
+        </p:spPr>
+        <p:txBody>
+          <a:bodyPr wrap="square" lIns="0" rIns="0" tIns="0" bIns="0" anchor="t">
+            <a:spAutoFit/>
+          </a:bodyPr>
+          <a:lstStyle/>
+          <a:p>
+            <a:pPr algn="l">
+              <a:lnSpc>
+                <a:spcPts val="754"/>
+              </a:lnSpc>
+            </a:pPr>
+            <a:r>
+              <a:rPr sz="520" b="1" spc="240">
+                <a:solidFill>
+                  <a:srgbClr val="6B7280"/>
+                </a:solidFill>
+                <a:latin typeface="맑은 고딕"/>
+                <a:ea typeface="맑은 고딕"/>
+              </a:rPr>
+              <a:t>담당 업무</a:t>
+            </a:r>
+          </a:p>
+        </p:txBody>
+      </p:sp>
+      <p:sp>
+        <p:nvSpPr>
+          <p:cNvPr id="3" name="Rectangle 2"/>
           <p:cNvSpPr/>
           <p:nvPr/>
         </p:nvSpPr>
         <p:spPr>
           <a:xfrm>
-            <a:off x="0" y="0"/>
-            <a:ext cx="3240000" cy="1800000"/>
+            <a:off x="252000" y="352800"/>
+            <a:ext cx="108000" cy="14400"/>
           </a:xfrm>
           <a:prstGeom prst="rect">
             <a:avLst/>
@@ -3564,109 +4226,447 @@
           </a:p>
         </p:txBody>
       </p:sp>
-      <p:sp>
-        <p:nvSpPr>
-          <p:cNvPr id="3" name="Freeform 2"/>
+      <p:cxnSp>
+        <p:nvCxnSpPr>
+          <p:cNvPr id="4" name="Connector 3"/>
+          <p:cNvCxnSpPr/>
+          <p:nvPr/>
+        </p:nvCxnSpPr>
+        <p:spPr>
+          <a:xfrm>
+            <a:off x="252000" y="453600"/>
+            <a:ext cx="1512000" cy="0"/>
+          </a:xfrm>
+          <a:prstGeom prst="line">
+            <a:avLst/>
+          </a:prstGeom>
+          <a:ln w="3600">
+            <a:solidFill>
+              <a:srgbClr val="E3E5E9"/>
+            </a:solidFill>
+          </a:ln>
+        </p:spPr>
+      </p:cxnSp>
+      <p:sp>
+        <p:nvSpPr>
+          <p:cNvPr id="5" name="텍스트"/>
+          <p:cNvSpPr txBox="1"/>
+          <p:nvPr/>
+        </p:nvSpPr>
+        <p:spPr>
+          <a:xfrm>
+            <a:off x="252000" y="507600"/>
+            <a:ext cx="216000" cy="95251"/>
+          </a:xfrm>
+          <a:prstGeom prst="rect">
+            <a:avLst/>
+          </a:prstGeom>
+          <a:noFill/>
+        </p:spPr>
+        <p:txBody>
+          <a:bodyPr wrap="square" lIns="0" rIns="0" tIns="0" bIns="0" anchor="t">
+            <a:spAutoFit/>
+          </a:bodyPr>
+          <a:lstStyle/>
+          <a:p>
+            <a:pPr algn="l">
+              <a:lnSpc>
+                <a:spcPts val="725"/>
+              </a:lnSpc>
+            </a:pPr>
+            <a:r>
+              <a:rPr sz="500" b="1" spc="100">
+                <a:solidFill>
+                  <a:srgbClr val="6B7280"/>
+                </a:solidFill>
+                <a:latin typeface="맑은 고딕"/>
+                <a:ea typeface="맑은 고딕"/>
+              </a:rPr>
+              <a:t>01</a:t>
+            </a:r>
+          </a:p>
+        </p:txBody>
+      </p:sp>
+      <p:sp>
+        <p:nvSpPr>
+          <p:cNvPr id="6" name="텍스트"/>
+          <p:cNvSpPr txBox="1"/>
+          <p:nvPr/>
+        </p:nvSpPr>
+        <p:spPr>
+          <a:xfrm>
+            <a:off x="489600" y="496800"/>
+            <a:ext cx="1260000" cy="133351"/>
+          </a:xfrm>
+          <a:prstGeom prst="rect">
+            <a:avLst/>
+          </a:prstGeom>
+          <a:noFill/>
+        </p:spPr>
+        <p:txBody>
+          <a:bodyPr wrap="square" lIns="0" rIns="0" tIns="0" bIns="0" anchor="t">
+            <a:spAutoFit/>
+          </a:bodyPr>
+          <a:lstStyle/>
+          <a:p>
+            <a:pPr algn="l">
+              <a:lnSpc>
+                <a:spcPts val="1015"/>
+              </a:lnSpc>
+            </a:pPr>
+            <a:r>
+              <a:rPr sz="700" b="0">
+                <a:solidFill>
+                  <a:srgbClr val="12151C"/>
+                </a:solidFill>
+                <a:latin typeface="맑은 고딕"/>
+                <a:ea typeface="맑은 고딕"/>
+              </a:rPr>
+              <a:t>개발</a:t>
+            </a:r>
+          </a:p>
+        </p:txBody>
+      </p:sp>
+      <p:cxnSp>
+        <p:nvCxnSpPr>
+          <p:cNvPr id="7" name="Connector 6"/>
+          <p:cNvCxnSpPr/>
+          <p:nvPr/>
+        </p:nvCxnSpPr>
+        <p:spPr>
+          <a:xfrm>
+            <a:off x="252000" y="640800"/>
+            <a:ext cx="1512000" cy="0"/>
+          </a:xfrm>
+          <a:prstGeom prst="line">
+            <a:avLst/>
+          </a:prstGeom>
+          <a:ln w="3600">
+            <a:solidFill>
+              <a:srgbClr val="E3E5E9"/>
+            </a:solidFill>
+          </a:ln>
+        </p:spPr>
+      </p:cxnSp>
+      <p:sp>
+        <p:nvSpPr>
+          <p:cNvPr id="8" name="텍스트"/>
+          <p:cNvSpPr txBox="1"/>
+          <p:nvPr/>
+        </p:nvSpPr>
+        <p:spPr>
+          <a:xfrm>
+            <a:off x="252000" y="694800"/>
+            <a:ext cx="216000" cy="95251"/>
+          </a:xfrm>
+          <a:prstGeom prst="rect">
+            <a:avLst/>
+          </a:prstGeom>
+          <a:noFill/>
+        </p:spPr>
+        <p:txBody>
+          <a:bodyPr wrap="square" lIns="0" rIns="0" tIns="0" bIns="0" anchor="t">
+            <a:spAutoFit/>
+          </a:bodyPr>
+          <a:lstStyle/>
+          <a:p>
+            <a:pPr algn="l">
+              <a:lnSpc>
+                <a:spcPts val="725"/>
+              </a:lnSpc>
+            </a:pPr>
+            <a:r>
+              <a:rPr sz="500" b="1" spc="100">
+                <a:solidFill>
+                  <a:srgbClr val="6B7280"/>
+                </a:solidFill>
+                <a:latin typeface="맑은 고딕"/>
+                <a:ea typeface="맑은 고딕"/>
+              </a:rPr>
+              <a:t>02</a:t>
+            </a:r>
+          </a:p>
+        </p:txBody>
+      </p:sp>
+      <p:sp>
+        <p:nvSpPr>
+          <p:cNvPr id="9" name="텍스트"/>
+          <p:cNvSpPr txBox="1"/>
+          <p:nvPr/>
+        </p:nvSpPr>
+        <p:spPr>
+          <a:xfrm>
+            <a:off x="489600" y="684000"/>
+            <a:ext cx="1260000" cy="133351"/>
+          </a:xfrm>
+          <a:prstGeom prst="rect">
+            <a:avLst/>
+          </a:prstGeom>
+          <a:noFill/>
+        </p:spPr>
+        <p:txBody>
+          <a:bodyPr wrap="square" lIns="0" rIns="0" tIns="0" bIns="0" anchor="t">
+            <a:spAutoFit/>
+          </a:bodyPr>
+          <a:lstStyle/>
+          <a:p>
+            <a:pPr algn="l">
+              <a:lnSpc>
+                <a:spcPts val="1015"/>
+              </a:lnSpc>
+            </a:pPr>
+            <a:r>
+              <a:rPr sz="700" b="0">
+                <a:solidFill>
+                  <a:srgbClr val="12151C"/>
+                </a:solidFill>
+                <a:latin typeface="맑은 고딕"/>
+                <a:ea typeface="맑은 고딕"/>
+              </a:rPr>
+              <a:t>데이터 분석</a:t>
+            </a:r>
+          </a:p>
+        </p:txBody>
+      </p:sp>
+      <p:cxnSp>
+        <p:nvCxnSpPr>
+          <p:cNvPr id="10" name="Connector 9"/>
+          <p:cNvCxnSpPr/>
+          <p:nvPr/>
+        </p:nvCxnSpPr>
+        <p:spPr>
+          <a:xfrm>
+            <a:off x="252000" y="828000"/>
+            <a:ext cx="1512000" cy="0"/>
+          </a:xfrm>
+          <a:prstGeom prst="line">
+            <a:avLst/>
+          </a:prstGeom>
+          <a:ln w="3600">
+            <a:solidFill>
+              <a:srgbClr val="E3E5E9"/>
+            </a:solidFill>
+          </a:ln>
+        </p:spPr>
+      </p:cxnSp>
+      <p:sp>
+        <p:nvSpPr>
+          <p:cNvPr id="11" name="텍스트"/>
+          <p:cNvSpPr txBox="1"/>
+          <p:nvPr/>
+        </p:nvSpPr>
+        <p:spPr>
+          <a:xfrm>
+            <a:off x="252000" y="882000"/>
+            <a:ext cx="216000" cy="95251"/>
+          </a:xfrm>
+          <a:prstGeom prst="rect">
+            <a:avLst/>
+          </a:prstGeom>
+          <a:noFill/>
+        </p:spPr>
+        <p:txBody>
+          <a:bodyPr wrap="square" lIns="0" rIns="0" tIns="0" bIns="0" anchor="t">
+            <a:spAutoFit/>
+          </a:bodyPr>
+          <a:lstStyle/>
+          <a:p>
+            <a:pPr algn="l">
+              <a:lnSpc>
+                <a:spcPts val="725"/>
+              </a:lnSpc>
+            </a:pPr>
+            <a:r>
+              <a:rPr sz="500" b="1" spc="100">
+                <a:solidFill>
+                  <a:srgbClr val="6B7280"/>
+                </a:solidFill>
+                <a:latin typeface="맑은 고딕"/>
+                <a:ea typeface="맑은 고딕"/>
+              </a:rPr>
+              <a:t>03</a:t>
+            </a:r>
+          </a:p>
+        </p:txBody>
+      </p:sp>
+      <p:sp>
+        <p:nvSpPr>
+          <p:cNvPr id="12" name="텍스트"/>
+          <p:cNvSpPr txBox="1"/>
+          <p:nvPr/>
+        </p:nvSpPr>
+        <p:spPr>
+          <a:xfrm>
+            <a:off x="489600" y="871200"/>
+            <a:ext cx="1260000" cy="133351"/>
+          </a:xfrm>
+          <a:prstGeom prst="rect">
+            <a:avLst/>
+          </a:prstGeom>
+          <a:noFill/>
+        </p:spPr>
+        <p:txBody>
+          <a:bodyPr wrap="square" lIns="0" rIns="0" tIns="0" bIns="0" anchor="t">
+            <a:spAutoFit/>
+          </a:bodyPr>
+          <a:lstStyle/>
+          <a:p>
+            <a:pPr algn="l">
+              <a:lnSpc>
+                <a:spcPts val="1015"/>
+              </a:lnSpc>
+            </a:pPr>
+            <a:r>
+              <a:rPr sz="700" b="0">
+                <a:solidFill>
+                  <a:srgbClr val="12151C"/>
+                </a:solidFill>
+                <a:latin typeface="맑은 고딕"/>
+                <a:ea typeface="맑은 고딕"/>
+              </a:rPr>
+              <a:t>계약 관리</a:t>
+            </a:r>
+          </a:p>
+        </p:txBody>
+      </p:sp>
+      <p:cxnSp>
+        <p:nvCxnSpPr>
+          <p:cNvPr id="13" name="Connector 12"/>
+          <p:cNvCxnSpPr/>
+          <p:nvPr/>
+        </p:nvCxnSpPr>
+        <p:spPr>
+          <a:xfrm>
+            <a:off x="252000" y="1015200"/>
+            <a:ext cx="1512000" cy="0"/>
+          </a:xfrm>
+          <a:prstGeom prst="line">
+            <a:avLst/>
+          </a:prstGeom>
+          <a:ln w="3600">
+            <a:solidFill>
+              <a:srgbClr val="E3E5E9"/>
+            </a:solidFill>
+          </a:ln>
+        </p:spPr>
+      </p:cxnSp>
+      <p:sp>
+        <p:nvSpPr>
+          <p:cNvPr id="14" name="텍스트"/>
+          <p:cNvSpPr txBox="1"/>
+          <p:nvPr/>
+        </p:nvSpPr>
+        <p:spPr>
+          <a:xfrm>
+            <a:off x="252000" y="1069200"/>
+            <a:ext cx="216000" cy="95251"/>
+          </a:xfrm>
+          <a:prstGeom prst="rect">
+            <a:avLst/>
+          </a:prstGeom>
+          <a:noFill/>
+        </p:spPr>
+        <p:txBody>
+          <a:bodyPr wrap="square" lIns="0" rIns="0" tIns="0" bIns="0" anchor="t">
+            <a:spAutoFit/>
+          </a:bodyPr>
+          <a:lstStyle/>
+          <a:p>
+            <a:pPr algn="l">
+              <a:lnSpc>
+                <a:spcPts val="725"/>
+              </a:lnSpc>
+            </a:pPr>
+            <a:r>
+              <a:rPr sz="500" b="1" spc="100">
+                <a:solidFill>
+                  <a:srgbClr val="6B7280"/>
+                </a:solidFill>
+                <a:latin typeface="맑은 고딕"/>
+                <a:ea typeface="맑은 고딕"/>
+              </a:rPr>
+              <a:t>04</a:t>
+            </a:r>
+          </a:p>
+        </p:txBody>
+      </p:sp>
+      <p:sp>
+        <p:nvSpPr>
+          <p:cNvPr id="15" name="텍스트"/>
+          <p:cNvSpPr txBox="1"/>
+          <p:nvPr/>
+        </p:nvSpPr>
+        <p:spPr>
+          <a:xfrm>
+            <a:off x="489600" y="1058400"/>
+            <a:ext cx="1260000" cy="133351"/>
+          </a:xfrm>
+          <a:prstGeom prst="rect">
+            <a:avLst/>
+          </a:prstGeom>
+          <a:noFill/>
+        </p:spPr>
+        <p:txBody>
+          <a:bodyPr wrap="square" lIns="0" rIns="0" tIns="0" bIns="0" anchor="t">
+            <a:spAutoFit/>
+          </a:bodyPr>
+          <a:lstStyle/>
+          <a:p>
+            <a:pPr algn="l">
+              <a:lnSpc>
+                <a:spcPts val="1015"/>
+              </a:lnSpc>
+            </a:pPr>
+            <a:r>
+              <a:rPr sz="700" b="0">
+                <a:solidFill>
+                  <a:srgbClr val="12151C"/>
+                </a:solidFill>
+                <a:latin typeface="맑은 고딕"/>
+                <a:ea typeface="맑은 고딕"/>
+              </a:rPr>
+              <a:t>운영 지원</a:t>
+            </a:r>
+          </a:p>
+        </p:txBody>
+      </p:sp>
+      <p:cxnSp>
+        <p:nvCxnSpPr>
+          <p:cNvPr id="16" name="Connector 15"/>
+          <p:cNvCxnSpPr/>
+          <p:nvPr/>
+        </p:nvCxnSpPr>
+        <p:spPr>
+          <a:xfrm>
+            <a:off x="252000" y="1202400"/>
+            <a:ext cx="1512000" cy="0"/>
+          </a:xfrm>
+          <a:prstGeom prst="line">
+            <a:avLst/>
+          </a:prstGeom>
+          <a:ln w="3600">
+            <a:solidFill>
+              <a:srgbClr val="E3E5E9"/>
+            </a:solidFill>
+          </a:ln>
+        </p:spPr>
+      </p:cxnSp>
+      <p:sp>
+        <p:nvSpPr>
+          <p:cNvPr id="17" name="Rectangle 16"/>
           <p:cNvSpPr/>
           <p:nvPr/>
         </p:nvSpPr>
         <p:spPr>
           <a:xfrm>
-            <a:off x="2412000" y="972000"/>
-            <a:ext cx="828000" cy="828000"/>
-          </a:xfrm>
-          <a:custGeom>
-            <a:avLst/>
-            <a:gdLst/>
-            <a:ahLst/>
-            <a:cxnLst/>
-            <a:rect l="l" t="t" r="r" b="b"/>
-            <a:pathLst>
-              <a:path w="828000" h="828000">
-                <a:moveTo>
-                  <a:pt x="828000" y="828000"/>
-                </a:moveTo>
-                <a:lnTo>
-                  <a:pt x="0" y="828000"/>
-                </a:lnTo>
-                <a:lnTo>
-                  <a:pt x="1773" y="773846"/>
-                </a:lnTo>
-                <a:lnTo>
-                  <a:pt x="7084" y="719924"/>
-                </a:lnTo>
-                <a:lnTo>
-                  <a:pt x="15910" y="666465"/>
-                </a:lnTo>
-                <a:lnTo>
-                  <a:pt x="28213" y="613698"/>
-                </a:lnTo>
-                <a:lnTo>
-                  <a:pt x="43942" y="561848"/>
-                </a:lnTo>
-                <a:lnTo>
-                  <a:pt x="63028" y="511138"/>
-                </a:lnTo>
-                <a:lnTo>
-                  <a:pt x="85389" y="461785"/>
-                </a:lnTo>
-                <a:lnTo>
-                  <a:pt x="110931" y="414000"/>
-                </a:lnTo>
-                <a:lnTo>
-                  <a:pt x="139543" y="367988"/>
-                </a:lnTo>
-                <a:lnTo>
-                  <a:pt x="171103" y="323946"/>
-                </a:lnTo>
-                <a:lnTo>
-                  <a:pt x="205477" y="282062"/>
-                </a:lnTo>
-                <a:lnTo>
-                  <a:pt x="242516" y="242516"/>
-                </a:lnTo>
-                <a:lnTo>
-                  <a:pt x="282062" y="205477"/>
-                </a:lnTo>
-                <a:lnTo>
-                  <a:pt x="323946" y="171103"/>
-                </a:lnTo>
-                <a:lnTo>
-                  <a:pt x="367988" y="139543"/>
-                </a:lnTo>
-                <a:lnTo>
-                  <a:pt x="414000" y="110931"/>
-                </a:lnTo>
-                <a:lnTo>
-                  <a:pt x="461785" y="85389"/>
-                </a:lnTo>
-                <a:lnTo>
-                  <a:pt x="511138" y="63028"/>
-                </a:lnTo>
-                <a:lnTo>
-                  <a:pt x="561848" y="43942"/>
-                </a:lnTo>
-                <a:lnTo>
-                  <a:pt x="613698" y="28213"/>
-                </a:lnTo>
-                <a:lnTo>
-                  <a:pt x="666465" y="15910"/>
-                </a:lnTo>
-                <a:lnTo>
-                  <a:pt x="719924" y="7084"/>
-                </a:lnTo>
-                <a:lnTo>
-                  <a:pt x="773846" y="1773"/>
-                </a:lnTo>
-                <a:lnTo>
-                  <a:pt x="828000" y="0"/>
-                </a:lnTo>
-                <a:close/>
-              </a:path>
-            </a:pathLst>
-          </a:custGeom>
+            <a:off x="2088000" y="252000"/>
+            <a:ext cx="900000" cy="1296000"/>
+          </a:xfrm>
+          <a:prstGeom prst="rect">
+            <a:avLst/>
+          </a:prstGeom>
           <a:solidFill>
-            <a:srgbClr val="FF668C"/>
+            <a:srgbClr val="FF3B6B"/>
           </a:solidFill>
           <a:ln>
             <a:noFill/>
@@ -3682,14 +4682,14 @@
       </p:sp>
       <p:sp>
         <p:nvSpPr>
-          <p:cNvPr id="4" name="텍스트"/>
+          <p:cNvPr id="18" name="텍스트"/>
           <p:cNvSpPr txBox="1"/>
           <p:nvPr/>
         </p:nvSpPr>
         <p:spPr>
           <a:xfrm>
-            <a:off x="252000" y="432000"/>
-            <a:ext cx="2304000" cy="720000"/>
+            <a:off x="2196000" y="360000"/>
+            <a:ext cx="684000" cy="95251"/>
           </a:xfrm>
           <a:prstGeom prst="rect">
             <a:avLst/>
@@ -3704,49 +4704,177 @@
           <a:p>
             <a:pPr algn="l">
               <a:lnSpc>
-                <a:spcPts val="1884"/>
+                <a:spcPts val="725"/>
               </a:lnSpc>
             </a:pPr>
             <a:r>
-              <a:rPr sz="1300" b="1">
+              <a:rPr sz="500" b="1" spc="240">
+                <a:solidFill>
+                  <a:srgbClr val="FFFFFF">
+                    <a:alpha val="75000"/>
+                  </a:srgbClr>
+                </a:solidFill>
+                <a:latin typeface="맑은 고딕"/>
+                <a:ea typeface="맑은 고딕"/>
+              </a:rPr>
+              <a:t>INFO</a:t>
+            </a:r>
+          </a:p>
+        </p:txBody>
+      </p:sp>
+      <p:sp>
+        <p:nvSpPr>
+          <p:cNvPr id="19" name="텍스트"/>
+          <p:cNvSpPr txBox="1"/>
+          <p:nvPr/>
+        </p:nvSpPr>
+        <p:spPr>
+          <a:xfrm>
+            <a:off x="2196000" y="504000"/>
+            <a:ext cx="684000" cy="121921"/>
+          </a:xfrm>
+          <a:prstGeom prst="rect">
+            <a:avLst/>
+          </a:prstGeom>
+          <a:noFill/>
+        </p:spPr>
+        <p:txBody>
+          <a:bodyPr wrap="square" lIns="0" rIns="0" tIns="0" bIns="0" anchor="t">
+            <a:spAutoFit/>
+          </a:bodyPr>
+          <a:lstStyle/>
+          <a:p>
+            <a:pPr algn="l">
+              <a:lnSpc>
+                <a:spcPts val="927"/>
+              </a:lnSpc>
+            </a:pPr>
+            <a:r>
+              <a:rPr sz="640" b="1">
                 <a:solidFill>
                   <a:srgbClr val="FFFFFF"/>
                 </a:solidFill>
                 <a:latin typeface="맑은 고딕"/>
                 <a:ea typeface="맑은 고딕"/>
               </a:rPr>
-              <a:t>믿고 맡길 수 있는</a:t>
-            </a:r>
-          </a:p>
+              <a:t>평일 09:30 – 18:30</a:t>
+            </a:r>
+          </a:p>
+        </p:txBody>
+      </p:sp>
+      <p:cxnSp>
+        <p:nvCxnSpPr>
+          <p:cNvPr id="20" name="Connector 19"/>
+          <p:cNvCxnSpPr/>
+          <p:nvPr/>
+        </p:nvCxnSpPr>
+        <p:spPr>
+          <a:xfrm>
+            <a:off x="2196000" y="770400"/>
+            <a:ext cx="684000" cy="0"/>
+          </a:xfrm>
+          <a:prstGeom prst="line">
+            <a:avLst/>
+          </a:prstGeom>
+          <a:ln w="3600">
+            <a:solidFill>
+              <a:srgbClr val="FFFFFF"/>
+            </a:solidFill>
+          </a:ln>
+        </p:spPr>
+      </p:cxnSp>
+      <p:sp>
+        <p:nvSpPr>
+          <p:cNvPr id="21" name="텍스트"/>
+          <p:cNvSpPr txBox="1"/>
+          <p:nvPr/>
+        </p:nvSpPr>
+        <p:spPr>
+          <a:xfrm>
+            <a:off x="2196000" y="849600"/>
+            <a:ext cx="684000" cy="91441"/>
+          </a:xfrm>
+          <a:prstGeom prst="rect">
+            <a:avLst/>
+          </a:prstGeom>
+          <a:noFill/>
+        </p:spPr>
+        <p:txBody>
+          <a:bodyPr wrap="square" lIns="0" rIns="0" tIns="0" bIns="0" anchor="t">
+            <a:spAutoFit/>
+          </a:bodyPr>
+          <a:lstStyle/>
           <a:p>
             <a:pPr algn="l">
               <a:lnSpc>
-                <a:spcPts val="1884"/>
+                <a:spcPts val="696"/>
               </a:lnSpc>
             </a:pPr>
             <a:r>
-              <a:rPr sz="1300" b="1">
+              <a:rPr sz="480" b="1" spc="140">
+                <a:solidFill>
+                  <a:srgbClr val="FFFFFF">
+                    <a:alpha val="75000"/>
+                  </a:srgbClr>
+                </a:solidFill>
+                <a:latin typeface="맑은 고딕"/>
+                <a:ea typeface="맑은 고딕"/>
+              </a:rPr>
+              <a:t>INSTAGRAM</a:t>
+            </a:r>
+          </a:p>
+        </p:txBody>
+      </p:sp>
+      <p:sp>
+        <p:nvSpPr>
+          <p:cNvPr id="22" name="텍스트"/>
+          <p:cNvSpPr txBox="1"/>
+          <p:nvPr/>
+        </p:nvSpPr>
+        <p:spPr>
+          <a:xfrm>
+            <a:off x="2196000" y="957600"/>
+            <a:ext cx="684000" cy="121921"/>
+          </a:xfrm>
+          <a:prstGeom prst="rect">
+            <a:avLst/>
+          </a:prstGeom>
+          <a:noFill/>
+        </p:spPr>
+        <p:txBody>
+          <a:bodyPr wrap="square" lIns="0" rIns="0" tIns="0" bIns="0" anchor="t">
+            <a:spAutoFit/>
+          </a:bodyPr>
+          <a:lstStyle/>
+          <a:p>
+            <a:pPr algn="l">
+              <a:lnSpc>
+                <a:spcPts val="927"/>
+              </a:lnSpc>
+            </a:pPr>
+            <a:r>
+              <a:rPr sz="640" b="1">
                 <a:solidFill>
                   <a:srgbClr val="FFFFFF"/>
                 </a:solidFill>
                 <a:latin typeface="맑은 고딕"/>
                 <a:ea typeface="맑은 고딕"/>
               </a:rPr>
-              <a:t>사람이 되겠습니다</a:t>
-            </a:r>
-          </a:p>
-        </p:txBody>
-      </p:sp>
-      <p:sp>
-        <p:nvSpPr>
-          <p:cNvPr id="5" name="텍스트"/>
+              <a:t>@아이디</a:t>
+            </a:r>
+          </a:p>
+        </p:txBody>
+      </p:sp>
+      <p:sp>
+        <p:nvSpPr>
+          <p:cNvPr id="23" name="텍스트"/>
           <p:cNvSpPr txBox="1"/>
           <p:nvPr/>
         </p:nvSpPr>
         <p:spPr>
           <a:xfrm>
-            <a:off x="252000" y="1476000"/>
-            <a:ext cx="1800000" cy="133351"/>
+            <a:off x="2196000" y="1368000"/>
+            <a:ext cx="720000" cy="106681"/>
           </a:xfrm>
           <a:prstGeom prst="rect">
             <a:avLst/>
@@ -3761,11 +4889,11 @@
           <a:p>
             <a:pPr algn="l">
               <a:lnSpc>
-                <a:spcPts val="1015"/>
+                <a:spcPts val="811"/>
               </a:lnSpc>
             </a:pPr>
             <a:r>
-              <a:rPr sz="700" b="1" spc="200">
+              <a:rPr sz="560" b="1" spc="80">
                 <a:solidFill>
                   <a:srgbClr val="FFFFFF"/>
                 </a:solidFill>
